--- a/docs/marketing/pitch_deck_20260904.pptx
+++ b/docs/marketing/pitch_deck_20260904.pptx
@@ -17,9 +17,16 @@
     <p:sldId id="265" r:id="rId11"/>
     <p:sldId id="266" r:id="rId12"/>
     <p:sldId id="267" r:id="rId13"/>
+    <p:sldId id="268" r:id="rId14"/>
+    <p:sldId id="269" r:id="rId15"/>
+    <p:sldId id="270" r:id="rId16"/>
+    <p:sldId id="271" r:id="rId17"/>
+    <p:sldId id="272" r:id="rId18"/>
+    <p:sldId id="273" r:id="rId19"/>
+    <p:sldId id="274" r:id="rId20"/>
   </p:sldIdLst>
   <p:notesMasterIdLst>
-    <p:notesMasterId r:id="rId14"/>
+    <p:notesMasterId r:id="rId21"/>
   </p:notesMasterIdLst>
   <p:sldSz cx="12192000" cy="6858000"/>
   <p:notesSz cx="6858000" cy="12192000"/>
@@ -601,7 +608,9 @@
           <a:p>
             <a:r>
               <a:rPr lang="en-US" dirty="0"/>
-              <a:t/>
+              <a:t>讲者注:EverMemBench 是第三方榜,不是我们出的卷子。
+LOCOMO n=1986:P@1 0.644 vs mem0 0.592 —— 换一张卷子,结论不掉。
+LME-M 检索 P@5 0.888,证据册里有,口头补。</a:t>
             </a:r>
             <a:endParaRPr lang="en-US" dirty="0"/>
           </a:p>
@@ -689,7 +698,8 @@
           <a:p>
             <a:r>
               <a:rPr lang="en-US" dirty="0"/>
-              <a:t/>
+              <a:t>讲者注:主动说清 LME-V2 是上游官方基准,我们提交的是成绩+调优栈。
+untuned 19.6/12.8 → 定案 40.0/38.4。</a:t>
             </a:r>
             <a:endParaRPr lang="en-US" dirty="0"/>
           </a:p>
@@ -777,7 +787,8 @@
           <a:p>
             <a:r>
               <a:rPr lang="en-US" dirty="0"/>
-              <a:t>15/5 分钟版裁剪:保留本页前 8 页+证据页+接入页。</a:t>
+              <a:t>讲者注:26.9s 是写入时压缩阵营调用 LLM controller 的 p95(同口径对比)。
+我们读取端纯检索+组装,无 LLM 调用,所以 p95 0.34-0.80s。</a:t>
             </a:r>
             <a:endParaRPr lang="en-US" dirty="0"/>
           </a:p>
@@ -819,6 +830,626 @@
 </p:notes>
 </file>
 
+<file path=ppt/notesSlides/notesSlide13.xml><?xml version="1.0" encoding="utf-8"?>
+<p:notes xmlns:a="http://schemas.openxmlformats.org/drawingml/2006/main" xmlns:r="http://schemas.openxmlformats.org/officeDocument/2006/relationships" xmlns:p="http://schemas.openxmlformats.org/presentationml/2006/main">
+  <p:cSld>
+    <p:spTree>
+      <p:nvGrpSpPr>
+        <p:cNvPr id="1" name=""/>
+        <p:cNvGrpSpPr/>
+        <p:nvPr/>
+      </p:nvGrpSpPr>
+      <p:grpSpPr>
+        <a:xfrm>
+          <a:off x="0" y="0"/>
+          <a:ext cx="0" cy="0"/>
+          <a:chOff x="0" y="0"/>
+          <a:chExt cx="0" cy="0"/>
+        </a:xfrm>
+      </p:grpSpPr>
+      <p:sp>
+        <p:nvSpPr>
+          <p:cNvPr id="2" name="Slide Image Placeholder 1"/>
+          <p:cNvSpPr>
+            <a:spLocks noGrp="1" noRot="1" noChangeAspect="1"/>
+          </p:cNvSpPr>
+          <p:nvPr>
+            <p:ph type="sldImg"/>
+          </p:nvPr>
+        </p:nvSpPr>
+        <p:spPr/>
+      </p:sp>
+      <p:sp>
+        <p:nvSpPr>
+          <p:cNvPr id="3" name="Notes Placeholder 2"/>
+          <p:cNvSpPr>
+            <a:spLocks noGrp="1"/>
+          </p:cNvSpPr>
+          <p:nvPr>
+            <p:ph type="body" idx="1"/>
+          </p:nvPr>
+        </p:nvSpPr>
+        <p:spPr/>
+        <p:txBody>
+          <a:bodyPr/>
+          <a:lstStyle/>
+          <a:p>
+            <a:r>
+              <a:rPr lang="en-US" dirty="0"/>
+              <a:t>讲者注:自嘲式讲,这一段最圈粉。一次断连把 14.2% 的题静默记成错答,方向曾完全相反(web +3.3 / ent −1.9)。
+这是 paper2(arXiv 在投)的主题:判官盲区是这个领域的 meta-problem。</a:t>
+            </a:r>
+            <a:endParaRPr lang="en-US" dirty="0"/>
+          </a:p>
+        </p:txBody>
+      </p:sp>
+      <p:sp>
+        <p:nvSpPr>
+          <p:cNvPr id="4" name="Slide Number Placeholder 3"/>
+          <p:cNvSpPr>
+            <a:spLocks noGrp="1"/>
+          </p:cNvSpPr>
+          <p:nvPr>
+            <p:ph type="sldNum" sz="quarter" idx="10"/>
+          </p:nvPr>
+        </p:nvSpPr>
+        <p:spPr/>
+        <p:txBody>
+          <a:bodyPr/>
+          <a:lstStyle/>
+          <a:p>
+            <a:fld id="{F7021451-1387-4CA6-816F-3879F97B5CBC}" type="slidenum">
+              <a:rPr lang="en-US"/>
+              <a:t>13</a:t>
+            </a:fld>
+            <a:endParaRPr lang="en-US"/>
+          </a:p>
+        </p:txBody>
+      </p:sp>
+    </p:spTree>
+    <p:extLst>
+      <p:ext uri="{BB962C8B-B14F-4D97-AF65-F5344CB8AC3E}">
+        <p14:creationId xmlns:p14="http://schemas.microsoft.com/office/powerpoint/2010/main" val="1024086991"/>
+      </p:ext>
+    </p:extLst>
+  </p:cSld>
+  <p:clrMapOvr>
+    <a:masterClrMapping/>
+  </p:clrMapOvr>
+</p:notes>
+</file>
+
+<file path=ppt/notesSlides/notesSlide14.xml><?xml version="1.0" encoding="utf-8"?>
+<p:notes xmlns:a="http://schemas.openxmlformats.org/drawingml/2006/main" xmlns:r="http://schemas.openxmlformats.org/officeDocument/2006/relationships" xmlns:p="http://schemas.openxmlformats.org/presentationml/2006/main">
+  <p:cSld>
+    <p:spTree>
+      <p:nvGrpSpPr>
+        <p:cNvPr id="1" name=""/>
+        <p:cNvGrpSpPr/>
+        <p:nvPr/>
+      </p:nvGrpSpPr>
+      <p:grpSpPr>
+        <a:xfrm>
+          <a:off x="0" y="0"/>
+          <a:ext cx="0" cy="0"/>
+          <a:chOff x="0" y="0"/>
+          <a:chExt cx="0" cy="0"/>
+        </a:xfrm>
+      </p:grpSpPr>
+      <p:sp>
+        <p:nvSpPr>
+          <p:cNvPr id="2" name="Slide Image Placeholder 1"/>
+          <p:cNvSpPr>
+            <a:spLocks noGrp="1" noRot="1" noChangeAspect="1"/>
+          </p:cNvSpPr>
+          <p:nvPr>
+            <p:ph type="sldImg"/>
+          </p:nvPr>
+        </p:nvSpPr>
+        <p:spPr/>
+      </p:sp>
+      <p:sp>
+        <p:nvSpPr>
+          <p:cNvPr id="3" name="Notes Placeholder 2"/>
+          <p:cNvSpPr>
+            <a:spLocks noGrp="1"/>
+          </p:cNvSpPr>
+          <p:nvPr>
+            <p:ph type="body" idx="1"/>
+          </p:nvPr>
+        </p:nvSpPr>
+        <p:spPr/>
+        <p:txBody>
+          <a:bodyPr/>
+          <a:lstStyle/>
+          <a:p>
+            <a:r>
+              <a:rPr lang="en-US" dirty="0"/>
+              <a:t>讲者注:每条都是真金白银跑出来的负结果,预注册锚+hash 可查。</a:t>
+            </a:r>
+            <a:endParaRPr lang="en-US" dirty="0"/>
+          </a:p>
+        </p:txBody>
+      </p:sp>
+      <p:sp>
+        <p:nvSpPr>
+          <p:cNvPr id="4" name="Slide Number Placeholder 3"/>
+          <p:cNvSpPr>
+            <a:spLocks noGrp="1"/>
+          </p:cNvSpPr>
+          <p:nvPr>
+            <p:ph type="sldNum" sz="quarter" idx="10"/>
+          </p:nvPr>
+        </p:nvSpPr>
+        <p:spPr/>
+        <p:txBody>
+          <a:bodyPr/>
+          <a:lstStyle/>
+          <a:p>
+            <a:fld id="{F7021451-1387-4CA6-816F-3879F97B5CBC}" type="slidenum">
+              <a:rPr lang="en-US"/>
+              <a:t>14</a:t>
+            </a:fld>
+            <a:endParaRPr lang="en-US"/>
+          </a:p>
+        </p:txBody>
+      </p:sp>
+    </p:spTree>
+    <p:extLst>
+      <p:ext uri="{BB962C8B-B14F-4D97-AF65-F5344CB8AC3E}">
+        <p14:creationId xmlns:p14="http://schemas.microsoft.com/office/powerpoint/2010/main" val="1024086991"/>
+      </p:ext>
+    </p:extLst>
+  </p:cSld>
+  <p:clrMapOvr>
+    <a:masterClrMapping/>
+  </p:clrMapOvr>
+</p:notes>
+</file>
+
+<file path=ppt/notesSlides/notesSlide15.xml><?xml version="1.0" encoding="utf-8"?>
+<p:notes xmlns:a="http://schemas.openxmlformats.org/drawingml/2006/main" xmlns:r="http://schemas.openxmlformats.org/officeDocument/2006/relationships" xmlns:p="http://schemas.openxmlformats.org/presentationml/2006/main">
+  <p:cSld>
+    <p:spTree>
+      <p:nvGrpSpPr>
+        <p:cNvPr id="1" name=""/>
+        <p:cNvGrpSpPr/>
+        <p:nvPr/>
+      </p:nvGrpSpPr>
+      <p:grpSpPr>
+        <a:xfrm>
+          <a:off x="0" y="0"/>
+          <a:ext cx="0" cy="0"/>
+          <a:chOff x="0" y="0"/>
+          <a:chExt cx="0" cy="0"/>
+        </a:xfrm>
+      </p:grpSpPr>
+      <p:sp>
+        <p:nvSpPr>
+          <p:cNvPr id="2" name="Slide Image Placeholder 1"/>
+          <p:cNvSpPr>
+            <a:spLocks noGrp="1" noRot="1" noChangeAspect="1"/>
+          </p:cNvSpPr>
+          <p:nvPr>
+            <p:ph type="sldImg"/>
+          </p:nvPr>
+        </p:nvSpPr>
+        <p:spPr/>
+      </p:sp>
+      <p:sp>
+        <p:nvSpPr>
+          <p:cNvPr id="3" name="Notes Placeholder 2"/>
+          <p:cNvSpPr>
+            <a:spLocks noGrp="1"/>
+          </p:cNvSpPr>
+          <p:nvPr>
+            <p:ph type="body" idx="1"/>
+          </p:nvPr>
+        </p:nvSpPr>
+        <p:spPr/>
+        <p:txBody>
+          <a:bodyPr/>
+          <a:lstStyle/>
+          <a:p>
+            <a:r>
+              <a:rPr lang="en-US" dirty="0"/>
+              <a:t>讲者注:nautilus 智涌平台多 agent 调度,compass 是吃狗粮产物。
+跨 agent 记忆胶囊:agent A 解题 reward 1.0 → 写胶囊 → agent B 直接继承(B 从 FAIL→PASS 的实录)。</a:t>
+            </a:r>
+            <a:endParaRPr lang="en-US" dirty="0"/>
+          </a:p>
+        </p:txBody>
+      </p:sp>
+      <p:sp>
+        <p:nvSpPr>
+          <p:cNvPr id="4" name="Slide Number Placeholder 3"/>
+          <p:cNvSpPr>
+            <a:spLocks noGrp="1"/>
+          </p:cNvSpPr>
+          <p:nvPr>
+            <p:ph type="sldNum" sz="quarter" idx="10"/>
+          </p:nvPr>
+        </p:nvSpPr>
+        <p:spPr/>
+        <p:txBody>
+          <a:bodyPr/>
+          <a:lstStyle/>
+          <a:p>
+            <a:fld id="{F7021451-1387-4CA6-816F-3879F97B5CBC}" type="slidenum">
+              <a:rPr lang="en-US"/>
+              <a:t>15</a:t>
+            </a:fld>
+            <a:endParaRPr lang="en-US"/>
+          </a:p>
+        </p:txBody>
+      </p:sp>
+    </p:spTree>
+    <p:extLst>
+      <p:ext uri="{BB962C8B-B14F-4D97-AF65-F5344CB8AC3E}">
+        <p14:creationId xmlns:p14="http://schemas.microsoft.com/office/powerpoint/2010/main" val="1024086991"/>
+      </p:ext>
+    </p:extLst>
+  </p:cSld>
+  <p:clrMapOvr>
+    <a:masterClrMapping/>
+  </p:clrMapOvr>
+</p:notes>
+</file>
+
+<file path=ppt/notesSlides/notesSlide16.xml><?xml version="1.0" encoding="utf-8"?>
+<p:notes xmlns:a="http://schemas.openxmlformats.org/drawingml/2006/main" xmlns:r="http://schemas.openxmlformats.org/officeDocument/2006/relationships" xmlns:p="http://schemas.openxmlformats.org/presentationml/2006/main">
+  <p:cSld>
+    <p:spTree>
+      <p:nvGrpSpPr>
+        <p:cNvPr id="1" name=""/>
+        <p:cNvGrpSpPr/>
+        <p:nvPr/>
+      </p:nvGrpSpPr>
+      <p:grpSpPr>
+        <a:xfrm>
+          <a:off x="0" y="0"/>
+          <a:ext cx="0" cy="0"/>
+          <a:chOff x="0" y="0"/>
+          <a:chExt cx="0" cy="0"/>
+        </a:xfrm>
+      </p:grpSpPr>
+      <p:sp>
+        <p:nvSpPr>
+          <p:cNvPr id="2" name="Slide Image Placeholder 1"/>
+          <p:cNvSpPr>
+            <a:spLocks noGrp="1" noRot="1" noChangeAspect="1"/>
+          </p:cNvSpPr>
+          <p:nvPr>
+            <p:ph type="sldImg"/>
+          </p:nvPr>
+        </p:nvSpPr>
+        <p:spPr/>
+      </p:sp>
+      <p:sp>
+        <p:nvSpPr>
+          <p:cNvPr id="3" name="Notes Placeholder 2"/>
+          <p:cNvSpPr>
+            <a:spLocks noGrp="1"/>
+          </p:cNvSpPr>
+          <p:nvPr>
+            <p:ph type="body" idx="1"/>
+          </p:nvPr>
+        </p:nvSpPr>
+        <p:spPr/>
+        <p:txBody>
+          <a:bodyPr/>
+          <a:lstStyle/>
+          <a:p>
+            <a:r>
+              <a:rPr lang="en-US" dirty="0"/>
+              <a:t>讲者注:现场跑真实终端;若环境故障切录屏(1080p 已备)。
+对照组:空白记忆同一 query → 空。录屏兜底按 demo_recording_script.md 分镜。</a:t>
+            </a:r>
+            <a:endParaRPr lang="en-US" dirty="0"/>
+          </a:p>
+        </p:txBody>
+      </p:sp>
+      <p:sp>
+        <p:nvSpPr>
+          <p:cNvPr id="4" name="Slide Number Placeholder 3"/>
+          <p:cNvSpPr>
+            <a:spLocks noGrp="1"/>
+          </p:cNvSpPr>
+          <p:nvPr>
+            <p:ph type="sldNum" sz="quarter" idx="10"/>
+          </p:nvPr>
+        </p:nvSpPr>
+        <p:spPr/>
+        <p:txBody>
+          <a:bodyPr/>
+          <a:lstStyle/>
+          <a:p>
+            <a:fld id="{F7021451-1387-4CA6-816F-3879F97B5CBC}" type="slidenum">
+              <a:rPr lang="en-US"/>
+              <a:t>16</a:t>
+            </a:fld>
+            <a:endParaRPr lang="en-US"/>
+          </a:p>
+        </p:txBody>
+      </p:sp>
+    </p:spTree>
+    <p:extLst>
+      <p:ext uri="{BB962C8B-B14F-4D97-AF65-F5344CB8AC3E}">
+        <p14:creationId xmlns:p14="http://schemas.microsoft.com/office/powerpoint/2010/main" val="1024086991"/>
+      </p:ext>
+    </p:extLst>
+  </p:cSld>
+  <p:clrMapOvr>
+    <a:masterClrMapping/>
+  </p:clrMapOvr>
+</p:notes>
+</file>
+
+<file path=ppt/notesSlides/notesSlide17.xml><?xml version="1.0" encoding="utf-8"?>
+<p:notes xmlns:a="http://schemas.openxmlformats.org/drawingml/2006/main" xmlns:r="http://schemas.openxmlformats.org/officeDocument/2006/relationships" xmlns:p="http://schemas.openxmlformats.org/presentationml/2006/main">
+  <p:cSld>
+    <p:spTree>
+      <p:nvGrpSpPr>
+        <p:cNvPr id="1" name=""/>
+        <p:cNvGrpSpPr/>
+        <p:nvPr/>
+      </p:nvGrpSpPr>
+      <p:grpSpPr>
+        <a:xfrm>
+          <a:off x="0" y="0"/>
+          <a:ext cx="0" cy="0"/>
+          <a:chOff x="0" y="0"/>
+          <a:chExt cx="0" cy="0"/>
+        </a:xfrm>
+      </p:grpSpPr>
+      <p:sp>
+        <p:nvSpPr>
+          <p:cNvPr id="2" name="Slide Image Placeholder 1"/>
+          <p:cNvSpPr>
+            <a:spLocks noGrp="1" noRot="1" noChangeAspect="1"/>
+          </p:cNvSpPr>
+          <p:nvPr>
+            <p:ph type="sldImg"/>
+          </p:nvPr>
+        </p:nvSpPr>
+        <p:spPr/>
+      </p:sp>
+      <p:sp>
+        <p:nvSpPr>
+          <p:cNvPr id="3" name="Notes Placeholder 2"/>
+          <p:cNvSpPr>
+            <a:spLocks noGrp="1"/>
+          </p:cNvSpPr>
+          <p:nvPr>
+            <p:ph type="body" idx="1"/>
+          </p:nvPr>
+        </p:nvSpPr>
+        <p:spPr/>
+        <p:txBody>
+          <a:bodyPr/>
+          <a:lstStyle/>
+          <a:p>
+            <a:r>
+              <a:rPr lang="en-US" dirty="0"/>
+              <a:t>讲者注:价值主张一句话:把记忆从"按 token 交租"变成"一次部署,免费无限"。</a:t>
+            </a:r>
+            <a:endParaRPr lang="en-US" dirty="0"/>
+          </a:p>
+        </p:txBody>
+      </p:sp>
+      <p:sp>
+        <p:nvSpPr>
+          <p:cNvPr id="4" name="Slide Number Placeholder 3"/>
+          <p:cNvSpPr>
+            <a:spLocks noGrp="1"/>
+          </p:cNvSpPr>
+          <p:nvPr>
+            <p:ph type="sldNum" sz="quarter" idx="10"/>
+          </p:nvPr>
+        </p:nvSpPr>
+        <p:spPr/>
+        <p:txBody>
+          <a:bodyPr/>
+          <a:lstStyle/>
+          <a:p>
+            <a:fld id="{F7021451-1387-4CA6-816F-3879F97B5CBC}" type="slidenum">
+              <a:rPr lang="en-US"/>
+              <a:t>17</a:t>
+            </a:fld>
+            <a:endParaRPr lang="en-US"/>
+          </a:p>
+        </p:txBody>
+      </p:sp>
+    </p:spTree>
+    <p:extLst>
+      <p:ext uri="{BB962C8B-B14F-4D97-AF65-F5344CB8AC3E}">
+        <p14:creationId xmlns:p14="http://schemas.microsoft.com/office/powerpoint/2010/main" val="1024086991"/>
+      </p:ext>
+    </p:extLst>
+  </p:cSld>
+  <p:clrMapOvr>
+    <a:masterClrMapping/>
+  </p:clrMapOvr>
+</p:notes>
+</file>
+
+<file path=ppt/notesSlides/notesSlide18.xml><?xml version="1.0" encoding="utf-8"?>
+<p:notes xmlns:a="http://schemas.openxmlformats.org/drawingml/2006/main" xmlns:r="http://schemas.openxmlformats.org/officeDocument/2006/relationships" xmlns:p="http://schemas.openxmlformats.org/presentationml/2006/main">
+  <p:cSld>
+    <p:spTree>
+      <p:nvGrpSpPr>
+        <p:cNvPr id="1" name=""/>
+        <p:cNvGrpSpPr/>
+        <p:nvPr/>
+      </p:nvGrpSpPr>
+      <p:grpSpPr>
+        <a:xfrm>
+          <a:off x="0" y="0"/>
+          <a:ext cx="0" cy="0"/>
+          <a:chOff x="0" y="0"/>
+          <a:chExt cx="0" cy="0"/>
+        </a:xfrm>
+      </p:grpSpPr>
+      <p:sp>
+        <p:nvSpPr>
+          <p:cNvPr id="2" name="Slide Image Placeholder 1"/>
+          <p:cNvSpPr>
+            <a:spLocks noGrp="1" noRot="1" noChangeAspect="1"/>
+          </p:cNvSpPr>
+          <p:nvPr>
+            <p:ph type="sldImg"/>
+          </p:nvPr>
+        </p:nvSpPr>
+        <p:spPr/>
+      </p:sp>
+      <p:sp>
+        <p:nvSpPr>
+          <p:cNvPr id="3" name="Notes Placeholder 2"/>
+          <p:cNvSpPr>
+            <a:spLocks noGrp="1"/>
+          </p:cNvSpPr>
+          <p:nvPr>
+            <p:ph type="body" idx="1"/>
+          </p:nvPr>
+        </p:nvSpPr>
+        <p:spPr/>
+        <p:txBody>
+          <a:bodyPr/>
+          <a:lstStyle/>
+          <a:p>
+            <a:r>
+              <a:rPr lang="en-US" dirty="0"/>
+              <a:t>讲者注:结尾停在这句。130 天 771 commits,其中 603 由 agent 舰队提交 —— 产品最硬的证明。</a:t>
+            </a:r>
+            <a:endParaRPr lang="en-US" dirty="0"/>
+          </a:p>
+        </p:txBody>
+      </p:sp>
+      <p:sp>
+        <p:nvSpPr>
+          <p:cNvPr id="4" name="Slide Number Placeholder 3"/>
+          <p:cNvSpPr>
+            <a:spLocks noGrp="1"/>
+          </p:cNvSpPr>
+          <p:nvPr>
+            <p:ph type="sldNum" sz="quarter" idx="10"/>
+          </p:nvPr>
+        </p:nvSpPr>
+        <p:spPr/>
+        <p:txBody>
+          <a:bodyPr/>
+          <a:lstStyle/>
+          <a:p>
+            <a:fld id="{F7021451-1387-4CA6-816F-3879F97B5CBC}" type="slidenum">
+              <a:rPr lang="en-US"/>
+              <a:t>18</a:t>
+            </a:fld>
+            <a:endParaRPr lang="en-US"/>
+          </a:p>
+        </p:txBody>
+      </p:sp>
+    </p:spTree>
+    <p:extLst>
+      <p:ext uri="{BB962C8B-B14F-4D97-AF65-F5344CB8AC3E}">
+        <p14:creationId xmlns:p14="http://schemas.microsoft.com/office/powerpoint/2010/main" val="1024086991"/>
+      </p:ext>
+    </p:extLst>
+  </p:cSld>
+  <p:clrMapOvr>
+    <a:masterClrMapping/>
+  </p:clrMapOvr>
+</p:notes>
+</file>
+
+<file path=ppt/notesSlides/notesSlide19.xml><?xml version="1.0" encoding="utf-8"?>
+<p:notes xmlns:a="http://schemas.openxmlformats.org/drawingml/2006/main" xmlns:r="http://schemas.openxmlformats.org/officeDocument/2006/relationships" xmlns:p="http://schemas.openxmlformats.org/presentationml/2006/main">
+  <p:cSld>
+    <p:spTree>
+      <p:nvGrpSpPr>
+        <p:cNvPr id="1" name=""/>
+        <p:cNvGrpSpPr/>
+        <p:nvPr/>
+      </p:nvGrpSpPr>
+      <p:grpSpPr>
+        <a:xfrm>
+          <a:off x="0" y="0"/>
+          <a:ext cx="0" cy="0"/>
+          <a:chOff x="0" y="0"/>
+          <a:chExt cx="0" cy="0"/>
+        </a:xfrm>
+      </p:grpSpPr>
+      <p:sp>
+        <p:nvSpPr>
+          <p:cNvPr id="2" name="Slide Image Placeholder 1"/>
+          <p:cNvSpPr>
+            <a:spLocks noGrp="1" noRot="1" noChangeAspect="1"/>
+          </p:cNvSpPr>
+          <p:nvPr>
+            <p:ph type="sldImg"/>
+          </p:nvPr>
+        </p:nvSpPr>
+        <p:spPr/>
+      </p:sp>
+      <p:sp>
+        <p:nvSpPr>
+          <p:cNvPr id="3" name="Notes Placeholder 2"/>
+          <p:cNvSpPr>
+            <a:spLocks noGrp="1"/>
+          </p:cNvSpPr>
+          <p:nvPr>
+            <p:ph type="body" idx="1"/>
+          </p:nvPr>
+        </p:nvSpPr>
+        <p:spPr/>
+        <p:txBody>
+          <a:bodyPr/>
+          <a:lstStyle/>
+          <a:p>
+            <a:r>
+              <a:rPr lang="en-US" dirty="0"/>
+              <a:t>15/5 分钟版裁剪:保留前 8 页+延迟页+demo 页+接入页。
+内容改动后重出:npx @marp-team/marp-cli pitch_deck_outline_20260904.md -o pitch_deck_20260904.pptx</a:t>
+            </a:r>
+            <a:endParaRPr lang="en-US" dirty="0"/>
+          </a:p>
+        </p:txBody>
+      </p:sp>
+      <p:sp>
+        <p:nvSpPr>
+          <p:cNvPr id="4" name="Slide Number Placeholder 3"/>
+          <p:cNvSpPr>
+            <a:spLocks noGrp="1"/>
+          </p:cNvSpPr>
+          <p:nvPr>
+            <p:ph type="sldNum" sz="quarter" idx="10"/>
+          </p:nvPr>
+        </p:nvSpPr>
+        <p:spPr/>
+        <p:txBody>
+          <a:bodyPr/>
+          <a:lstStyle/>
+          <a:p>
+            <a:fld id="{F7021451-1387-4CA6-816F-3879F97B5CBC}" type="slidenum">
+              <a:rPr lang="en-US"/>
+              <a:t>19</a:t>
+            </a:fld>
+            <a:endParaRPr lang="en-US"/>
+          </a:p>
+        </p:txBody>
+      </p:sp>
+    </p:spTree>
+    <p:extLst>
+      <p:ext uri="{BB962C8B-B14F-4D97-AF65-F5344CB8AC3E}">
+        <p14:creationId xmlns:p14="http://schemas.microsoft.com/office/powerpoint/2010/main" val="1024086991"/>
+      </p:ext>
+    </p:extLst>
+  </p:cSld>
+  <p:clrMapOvr>
+    <a:masterClrMapping/>
+  </p:clrMapOvr>
+</p:notes>
+</file>
+
 <file path=ppt/notesSlides/notesSlide2.xml><?xml version="1.0" encoding="utf-8"?>
 <p:notes xmlns:a="http://schemas.openxmlformats.org/drawingml/2006/main" xmlns:r="http://schemas.openxmlformats.org/officeDocument/2006/relationships" xmlns:p="http://schemas.openxmlformats.org/presentationml/2006/main">
   <p:cSld>
@@ -865,7 +1496,8 @@
           <a:p>
             <a:r>
               <a:rPr lang="en-US" dirty="0"/>
-              <a:t>讲者注:这一幕只建立问题,不亮方案。问观众:你们的 agent 记得你上周说过什么吗?</a:t>
+              <a:t>讲者注:这一页只建立问题,不亮方案。问观众:你们的 agent 记得你上周说过什么吗?
+ChatGPT 会随对话推进覆写关键信息(ICLR 2025 LongMemEval 论文·人肉研究);长上下文直读性能掉 30-60%。</a:t>
             </a:r>
             <a:endParaRPr lang="en-US" dirty="0"/>
           </a:p>
@@ -953,7 +1585,7 @@
           <a:p>
             <a:r>
               <a:rPr lang="en-US" dirty="0"/>
-              <a:t/>
+              <a:t>讲者注:表格别逐行念,指着右列"写入时"三个字打三遍。</a:t>
             </a:r>
             <a:endParaRPr lang="en-US" dirty="0"/>
           </a:p>
@@ -1041,7 +1673,8 @@
           <a:p>
             <a:r>
               <a:rPr lang="en-US" dirty="0"/>
-              <a:t>讲者注:六层图来自 ARCHITECTURE.md,一字未改。强调"写入不调 LLM"停两秒。</a:t>
+              <a:t>讲者注:六层结构来自 ARCHITECTURE.md。强调"写入不调 LLM"停两秒。
+进化层防毒门:reward ≥ 1.0 的经验才写回胶囊。</a:t>
             </a:r>
             <a:endParaRPr lang="en-US" dirty="0"/>
           </a:p>
@@ -1217,7 +1850,8 @@
           <a:p>
             <a:r>
               <a:rPr lang="en-US" dirty="0"/>
-              <a:t/>
+              <a:t>讲者注:42.6→75.4 的全部来源就是这四步,没有其他魔法。
+负结果同样预注册:rerank 有害(-2pt)· K=50 无增益 · 小 embedder 更差。</a:t>
             </a:r>
             <a:endParaRPr lang="en-US" dirty="0"/>
           </a:p>
@@ -1305,7 +1939,8 @@
           <a:p>
             <a:r>
               <a:rPr lang="en-US" dirty="0"/>
-              <a:t>讲者注:如果只记一页,记这页。强调"同题同判据"四个字。</a:t>
+              <a:t>讲者注:81.6% 是剔除 71 道判官故障题的口径,双口径强制披露。
+判据先于跑数预注册,预注册文件带 hash 落仓。</a:t>
             </a:r>
             <a:endParaRPr lang="en-US" dirty="0"/>
           </a:p>
@@ -1393,7 +2028,8 @@
           <a:p>
             <a:r>
               <a:rPr lang="en-US" dirty="0"/>
-              <a:t>讲者注:自嘲式讲,这一段最圈粉。这是 paper2(arXiv 在投)的主题。</a:t>
+              <a:t>讲者注:tr 62.4 是已知短板,主动讲 —— 不藏短板是可信度的一部分。
+ssu 97.1 说明单会话用户事实几乎全对;tr 是时序推理,检索型方案的天然硬骨头。</a:t>
             </a:r>
             <a:endParaRPr lang="en-US" dirty="0"/>
           </a:p>
@@ -1481,7 +2117,8 @@
           <a:p>
             <a:r>
               <a:rPr lang="en-US" dirty="0"/>
-              <a:t/>
+              <a:t>讲者注:如果有人只记一页,记这页。强调"同题同判据"四个字。
+跨 harness 分数不可比 —— mem0 自报 94.4% 是他们的 harness/判官/口径,不比。</a:t>
             </a:r>
             <a:endParaRPr lang="en-US" dirty="0"/>
           </a:p>
@@ -1950,6 +2587,279 @@
 <file path=ppt/slides/slide12.xml><?xml version="1.0" encoding="utf-8"?>
 <p:sld xmlns:a="http://schemas.openxmlformats.org/drawingml/2006/main" xmlns:r="http://schemas.openxmlformats.org/officeDocument/2006/relationships" xmlns:p="http://schemas.openxmlformats.org/presentationml/2006/main">
   <p:cSld name="Slide 12">
+    <p:bg>
+      <p:bgPr>
+        <a:blipFill dpi="0" rotWithShape="1">
+          <a:blip r:embed="rId1">
+            <a:lum/>
+          </a:blip>
+          <a:srcRect/>
+          <a:stretch>
+            <a:fillRect/>
+          </a:stretch>
+        </a:blipFill>
+        <a:effectLst/>
+      </p:bgPr>
+    </p:bg>
+    <p:spTree>
+      <p:nvGrpSpPr>
+        <p:cNvPr id="1" name=""/>
+        <p:cNvGrpSpPr/>
+        <p:nvPr/>
+      </p:nvGrpSpPr>
+      <p:grpSpPr>
+        <a:xfrm>
+          <a:off x="0" y="0"/>
+          <a:ext cx="0" cy="0"/>
+          <a:chOff x="0" y="0"/>
+          <a:chExt cx="0" cy="0"/>
+        </a:xfrm>
+      </p:grpSpPr>
+    </p:spTree>
+  </p:cSld>
+  <p:clrMapOvr>
+    <a:masterClrMapping/>
+  </p:clrMapOvr>
+</p:sld>
+</file>
+
+<file path=ppt/slides/slide13.xml><?xml version="1.0" encoding="utf-8"?>
+<p:sld xmlns:a="http://schemas.openxmlformats.org/drawingml/2006/main" xmlns:r="http://schemas.openxmlformats.org/officeDocument/2006/relationships" xmlns:p="http://schemas.openxmlformats.org/presentationml/2006/main">
+  <p:cSld name="Slide 13">
+    <p:bg>
+      <p:bgPr>
+        <a:blipFill dpi="0" rotWithShape="1">
+          <a:blip r:embed="rId1">
+            <a:lum/>
+          </a:blip>
+          <a:srcRect/>
+          <a:stretch>
+            <a:fillRect/>
+          </a:stretch>
+        </a:blipFill>
+        <a:effectLst/>
+      </p:bgPr>
+    </p:bg>
+    <p:spTree>
+      <p:nvGrpSpPr>
+        <p:cNvPr id="1" name=""/>
+        <p:cNvGrpSpPr/>
+        <p:nvPr/>
+      </p:nvGrpSpPr>
+      <p:grpSpPr>
+        <a:xfrm>
+          <a:off x="0" y="0"/>
+          <a:ext cx="0" cy="0"/>
+          <a:chOff x="0" y="0"/>
+          <a:chExt cx="0" cy="0"/>
+        </a:xfrm>
+      </p:grpSpPr>
+    </p:spTree>
+  </p:cSld>
+  <p:clrMapOvr>
+    <a:masterClrMapping/>
+  </p:clrMapOvr>
+</p:sld>
+</file>
+
+<file path=ppt/slides/slide14.xml><?xml version="1.0" encoding="utf-8"?>
+<p:sld xmlns:a="http://schemas.openxmlformats.org/drawingml/2006/main" xmlns:r="http://schemas.openxmlformats.org/officeDocument/2006/relationships" xmlns:p="http://schemas.openxmlformats.org/presentationml/2006/main">
+  <p:cSld name="Slide 14">
+    <p:bg>
+      <p:bgPr>
+        <a:blipFill dpi="0" rotWithShape="1">
+          <a:blip r:embed="rId1">
+            <a:lum/>
+          </a:blip>
+          <a:srcRect/>
+          <a:stretch>
+            <a:fillRect/>
+          </a:stretch>
+        </a:blipFill>
+        <a:effectLst/>
+      </p:bgPr>
+    </p:bg>
+    <p:spTree>
+      <p:nvGrpSpPr>
+        <p:cNvPr id="1" name=""/>
+        <p:cNvGrpSpPr/>
+        <p:nvPr/>
+      </p:nvGrpSpPr>
+      <p:grpSpPr>
+        <a:xfrm>
+          <a:off x="0" y="0"/>
+          <a:ext cx="0" cy="0"/>
+          <a:chOff x="0" y="0"/>
+          <a:chExt cx="0" cy="0"/>
+        </a:xfrm>
+      </p:grpSpPr>
+    </p:spTree>
+  </p:cSld>
+  <p:clrMapOvr>
+    <a:masterClrMapping/>
+  </p:clrMapOvr>
+</p:sld>
+</file>
+
+<file path=ppt/slides/slide15.xml><?xml version="1.0" encoding="utf-8"?>
+<p:sld xmlns:a="http://schemas.openxmlformats.org/drawingml/2006/main" xmlns:r="http://schemas.openxmlformats.org/officeDocument/2006/relationships" xmlns:p="http://schemas.openxmlformats.org/presentationml/2006/main">
+  <p:cSld name="Slide 15">
+    <p:bg>
+      <p:bgPr>
+        <a:blipFill dpi="0" rotWithShape="1">
+          <a:blip r:embed="rId1">
+            <a:lum/>
+          </a:blip>
+          <a:srcRect/>
+          <a:stretch>
+            <a:fillRect/>
+          </a:stretch>
+        </a:blipFill>
+        <a:effectLst/>
+      </p:bgPr>
+    </p:bg>
+    <p:spTree>
+      <p:nvGrpSpPr>
+        <p:cNvPr id="1" name=""/>
+        <p:cNvGrpSpPr/>
+        <p:nvPr/>
+      </p:nvGrpSpPr>
+      <p:grpSpPr>
+        <a:xfrm>
+          <a:off x="0" y="0"/>
+          <a:ext cx="0" cy="0"/>
+          <a:chOff x="0" y="0"/>
+          <a:chExt cx="0" cy="0"/>
+        </a:xfrm>
+      </p:grpSpPr>
+    </p:spTree>
+  </p:cSld>
+  <p:clrMapOvr>
+    <a:masterClrMapping/>
+  </p:clrMapOvr>
+</p:sld>
+</file>
+
+<file path=ppt/slides/slide16.xml><?xml version="1.0" encoding="utf-8"?>
+<p:sld xmlns:a="http://schemas.openxmlformats.org/drawingml/2006/main" xmlns:r="http://schemas.openxmlformats.org/officeDocument/2006/relationships" xmlns:p="http://schemas.openxmlformats.org/presentationml/2006/main">
+  <p:cSld name="Slide 16">
+    <p:bg>
+      <p:bgPr>
+        <a:blipFill dpi="0" rotWithShape="1">
+          <a:blip r:embed="rId1">
+            <a:lum/>
+          </a:blip>
+          <a:srcRect/>
+          <a:stretch>
+            <a:fillRect/>
+          </a:stretch>
+        </a:blipFill>
+        <a:effectLst/>
+      </p:bgPr>
+    </p:bg>
+    <p:spTree>
+      <p:nvGrpSpPr>
+        <p:cNvPr id="1" name=""/>
+        <p:cNvGrpSpPr/>
+        <p:nvPr/>
+      </p:nvGrpSpPr>
+      <p:grpSpPr>
+        <a:xfrm>
+          <a:off x="0" y="0"/>
+          <a:ext cx="0" cy="0"/>
+          <a:chOff x="0" y="0"/>
+          <a:chExt cx="0" cy="0"/>
+        </a:xfrm>
+      </p:grpSpPr>
+    </p:spTree>
+  </p:cSld>
+  <p:clrMapOvr>
+    <a:masterClrMapping/>
+  </p:clrMapOvr>
+</p:sld>
+</file>
+
+<file path=ppt/slides/slide17.xml><?xml version="1.0" encoding="utf-8"?>
+<p:sld xmlns:a="http://schemas.openxmlformats.org/drawingml/2006/main" xmlns:r="http://schemas.openxmlformats.org/officeDocument/2006/relationships" xmlns:p="http://schemas.openxmlformats.org/presentationml/2006/main">
+  <p:cSld name="Slide 17">
+    <p:bg>
+      <p:bgPr>
+        <a:blipFill dpi="0" rotWithShape="1">
+          <a:blip r:embed="rId1">
+            <a:lum/>
+          </a:blip>
+          <a:srcRect/>
+          <a:stretch>
+            <a:fillRect/>
+          </a:stretch>
+        </a:blipFill>
+        <a:effectLst/>
+      </p:bgPr>
+    </p:bg>
+    <p:spTree>
+      <p:nvGrpSpPr>
+        <p:cNvPr id="1" name=""/>
+        <p:cNvGrpSpPr/>
+        <p:nvPr/>
+      </p:nvGrpSpPr>
+      <p:grpSpPr>
+        <a:xfrm>
+          <a:off x="0" y="0"/>
+          <a:ext cx="0" cy="0"/>
+          <a:chOff x="0" y="0"/>
+          <a:chExt cx="0" cy="0"/>
+        </a:xfrm>
+      </p:grpSpPr>
+    </p:spTree>
+  </p:cSld>
+  <p:clrMapOvr>
+    <a:masterClrMapping/>
+  </p:clrMapOvr>
+</p:sld>
+</file>
+
+<file path=ppt/slides/slide18.xml><?xml version="1.0" encoding="utf-8"?>
+<p:sld xmlns:a="http://schemas.openxmlformats.org/drawingml/2006/main" xmlns:r="http://schemas.openxmlformats.org/officeDocument/2006/relationships" xmlns:p="http://schemas.openxmlformats.org/presentationml/2006/main">
+  <p:cSld name="Slide 18">
+    <p:bg>
+      <p:bgPr>
+        <a:blipFill dpi="0" rotWithShape="1">
+          <a:blip r:embed="rId1">
+            <a:lum/>
+          </a:blip>
+          <a:srcRect/>
+          <a:stretch>
+            <a:fillRect/>
+          </a:stretch>
+        </a:blipFill>
+        <a:effectLst/>
+      </p:bgPr>
+    </p:bg>
+    <p:spTree>
+      <p:nvGrpSpPr>
+        <p:cNvPr id="1" name=""/>
+        <p:cNvGrpSpPr/>
+        <p:nvPr/>
+      </p:nvGrpSpPr>
+      <p:grpSpPr>
+        <a:xfrm>
+          <a:off x="0" y="0"/>
+          <a:ext cx="0" cy="0"/>
+          <a:chOff x="0" y="0"/>
+          <a:chExt cx="0" cy="0"/>
+        </a:xfrm>
+      </p:grpSpPr>
+    </p:spTree>
+  </p:cSld>
+  <p:clrMapOvr>
+    <a:masterClrMapping/>
+  </p:clrMapOvr>
+</p:sld>
+</file>
+
+<file path=ppt/slides/slide19.xml><?xml version="1.0" encoding="utf-8"?>
+<p:sld xmlns:a="http://schemas.openxmlformats.org/drawingml/2006/main" xmlns:r="http://schemas.openxmlformats.org/officeDocument/2006/relationships" xmlns:p="http://schemas.openxmlformats.org/presentationml/2006/main">
+  <p:cSld name="Slide 19">
     <p:bg>
       <p:bgPr>
         <a:blipFill dpi="0" rotWithShape="1">

--- a/docs/marketing/pitch_deck_20260904.pptx
+++ b/docs/marketing/pitch_deck_20260904.pptx
@@ -2118,7 +2118,8 @@
             <a:r>
               <a:rPr lang="en-US" dirty="0"/>
               <a:t>讲者注:如果有人只记一页,记这页。强调"同题同判据"四个字。
-跨 harness 分数不可比 —— mem0 自报 94.4% 是他们的 harness/判官/口径,不比。</a:t>
+跨 harness 分数不可比 —— mem0 自报 94.4% 是他们的 harness/判官/口径,不比。
+备询:嵌入各用各的默认(我方 BGE-m3 / mem0 text-embedding-005),对方嵌入在部分单会话型更强,我们靠分型路由整体赢。</a:t>
             </a:r>
             <a:endParaRPr lang="en-US" dirty="0"/>
           </a:p>

--- a/docs/marketing/pitch_deck_20260904.pptx
+++ b/docs/marketing/pitch_deck_20260904.pptx
@@ -520,7 +520,7 @@
           <a:p>
             <a:r>
               <a:rPr lang="en-US" dirty="0"/>
-              <a:t>讲者注:开场 30 秒停顿,让标题被读完。这句是全文论点。</a:t>
+              <a:t/>
             </a:r>
             <a:endParaRPr lang="en-US" dirty="0"/>
           </a:p>
@@ -608,9 +608,7 @@
           <a:p>
             <a:r>
               <a:rPr lang="en-US" dirty="0"/>
-              <a:t>讲者注:EverMemBench 是第三方榜,不是我们出的卷子。
-LOCOMO n=1986:P@1 0.644 vs mem0 0.592 —— 换一张卷子,结论不掉。
-LME-M 检索 P@5 0.888,证据册里有,口头补。</a:t>
+              <a:t>讲者注:EverMem 主动用首轮 44.4 防挑样;LOCOMO 客场 P@1 0.644 vs 0.592;不 claim SOTA。</a:t>
             </a:r>
             <a:endParaRPr lang="en-US" dirty="0"/>
           </a:p>
@@ -698,8 +696,8 @@
           <a:p>
             <a:r>
               <a:rPr lang="en-US" dirty="0"/>
-              <a:t>讲者注:主动说清 LME-V2 是上游官方基准,我们提交的是成绩+调优栈。
-untuned 19.6/12.8 → 定案 40.0/38.4。</a:t>
+              <a:t>讲者注:451 题上游官方基准(xiaowu0162,Di Wu 等),attribution 归上游;untuned 19.6/12.8 → 三刀调优 40.0/38.4;
+官方坐标系里我们 ≈39.3 与最弱 RAG 相当——预算 1/8、延迟 1/47,效率轴是差异化,攻坚目标 55-60%。</a:t>
             </a:r>
             <a:endParaRPr lang="en-US" dirty="0"/>
           </a:p>
@@ -787,8 +785,7 @@
           <a:p>
             <a:r>
               <a:rPr lang="en-US" dirty="0"/>
-              <a:t>讲者注:26.9s 是写入时压缩阵营调用 LLM controller 的 p95(同口径对比)。
-我们读取端纯检索+组装,无 LLM 调用,所以 p95 0.34-0.80s。</a:t>
+              <a:t>讲者注:智能放在不花钱的时刻;冷启动尾部非稳态,诚实注记。</a:t>
             </a:r>
             <a:endParaRPr lang="en-US" dirty="0"/>
           </a:p>
@@ -876,8 +873,7 @@
           <a:p>
             <a:r>
               <a:rPr lang="en-US" dirty="0"/>
-              <a:t>讲者注:自嘲式讲,这一段最圈粉。一次断连把 14.2% 的题静默记成错答,方向曾完全相反(web +3.3 / ent −1.9)。
-这是 paper2(arXiv 在投)的主题:判官盲区是这个领域的 meta-problem。</a:t>
+              <a:t>讲者注:判官会静默失败——不抓,排行榜就是虚构的。全部配置层事故,零模型能力问题。</a:t>
             </a:r>
             <a:endParaRPr lang="en-US" dirty="0"/>
           </a:p>
@@ -965,7 +961,7 @@
           <a:p>
             <a:r>
               <a:rPr lang="en-US" dirty="0"/>
-              <a:t>讲者注:每条都是真金白银跑出来的负结果,预注册锚+hash 可查。</a:t>
+              <a:t>讲者注:每个负结果都是真金白银跑出来,预注册文件带 hash 落仓。</a:t>
             </a:r>
             <a:endParaRPr lang="en-US" dirty="0"/>
           </a:p>
@@ -1053,8 +1049,7 @@
           <a:p>
             <a:r>
               <a:rPr lang="en-US" dirty="0"/>
-              <a:t>讲者注:nautilus 智涌平台多 agent 调度,compass 是吃狗粮产物。
-跨 agent 记忆胶囊:agent A 解题 reward 1.0 → 写胶囊 → agent B 直接继承(B 从 FAIL→PASS 的实录)。</a:t>
+              <a:t>讲者注:130 天 771 commits,603 由 agent 舰队提交——这本身就是产品的证明。</a:t>
             </a:r>
             <a:endParaRPr lang="en-US" dirty="0"/>
           </a:p>
@@ -1142,8 +1137,7 @@
           <a:p>
             <a:r>
               <a:rPr lang="en-US" dirty="0"/>
-              <a:t>讲者注:现场跑真实终端;若环境故障切录屏(1080p 已备)。
-对照组:空白记忆同一 query → 空。录屏兜底按 demo_recording_script.md 分镜。</a:t>
+              <a:t>讲者注:对照组空库返回空,证明不是幻觉;环境故障切录屏(demo_recording_script.md)。</a:t>
             </a:r>
             <a:endParaRPr lang="en-US" dirty="0"/>
           </a:p>
@@ -1231,7 +1225,7 @@
           <a:p>
             <a:r>
               <a:rPr lang="en-US" dirty="0"/>
-              <a:t>讲者注:价值主张一句话:把记忆从"按 token 交租"变成"一次部署,免费无限"。</a:t>
+              <a:t/>
             </a:r>
             <a:endParaRPr lang="en-US" dirty="0"/>
           </a:p>
@@ -1319,7 +1313,7 @@
           <a:p>
             <a:r>
               <a:rPr lang="en-US" dirty="0"/>
-              <a:t>讲者注:结尾停在这句。130 天 771 commits,其中 603 由 agent 舰队提交 —— 产品最硬的证明。</a:t>
+              <a:t/>
             </a:r>
             <a:endParaRPr lang="en-US" dirty="0"/>
           </a:p>
@@ -1407,8 +1401,7 @@
           <a:p>
             <a:r>
               <a:rPr lang="en-US" dirty="0"/>
-              <a:t>15/5 分钟版裁剪:保留前 8 页+延迟页+demo 页+接入页。
-内容改动后重出:npx @marp-team/marp-cli pitch_deck_outline_20260904.md -o pitch_deck_20260904.pptx</a:t>
+              <a:t/>
             </a:r>
             <a:endParaRPr lang="en-US" dirty="0"/>
           </a:p>
@@ -1496,8 +1489,7 @@
           <a:p>
             <a:r>
               <a:rPr lang="en-US" dirty="0"/>
-              <a:t>讲者注:这一页只建立问题,不亮方案。问观众:你们的 agent 记得你上周说过什么吗?
-ChatGPT 会随对话推进覆写关键信息(ICLR 2025 LongMemEval 论文·人肉研究);长上下文直读性能掉 30-60%。</a:t>
+              <a:t>讲者注:建立问题,不亮方案。长上下文直读掉 30-60%;ChatGPT 压缩历史覆写关键信息(基准论文人肉研究)。</a:t>
             </a:r>
             <a:endParaRPr lang="en-US" dirty="0"/>
           </a:p>
@@ -1585,7 +1577,7 @@
           <a:p>
             <a:r>
               <a:rPr lang="en-US" dirty="0"/>
-              <a:t>讲者注:表格别逐行念,指着右列"写入时"三个字打三遍。</a:t>
+              <a:t/>
             </a:r>
             <a:endParaRPr lang="en-US" dirty="0"/>
           </a:p>
@@ -1673,8 +1665,7 @@
           <a:p>
             <a:r>
               <a:rPr lang="en-US" dirty="0"/>
-              <a:t>讲者注:六层结构来自 ARCHITECTURE.md。强调"写入不调 LLM"停两秒。
-进化层防毒门:reward ≥ 1.0 的经验才写回胶囊。</a:t>
+              <a:t>讲者注:写入不调 LLM 停两秒。治理层是独有件;进化层胶囊写回 reward≥1.0 质量门。</a:t>
             </a:r>
             <a:endParaRPr lang="en-US" dirty="0"/>
           </a:p>
@@ -1762,7 +1753,7 @@
           <a:p>
             <a:r>
               <a:rPr lang="en-US" dirty="0"/>
-              <a:t/>
+              <a:t>讲者注:三不变量一句一个;图是不变量 3 的可视化。</a:t>
             </a:r>
             <a:endParaRPr lang="en-US" dirty="0"/>
           </a:p>
@@ -1850,8 +1841,7 @@
           <a:p>
             <a:r>
               <a:rPr lang="en-US" dirty="0"/>
-              <a:t>讲者注:42.6→75.4 的全部来源就是这四步,没有其他魔法。
-负结果同样预注册:rerank 有害(-2pt)· K=50 无增益 · 小 embedder 更差。</a:t>
+              <a:t>讲者注:同样公开的负结果:rerank 有害(−2pt)· K=50 无增益 · 小 embedder 更差。</a:t>
             </a:r>
             <a:endParaRPr lang="en-US" dirty="0"/>
           </a:p>
@@ -1939,8 +1929,7 @@
           <a:p>
             <a:r>
               <a:rPr lang="en-US" dirty="0"/>
-              <a:t>讲者注:81.6% 是剔除 71 道判官故障题的口径,双口径强制披露。
-判据先于跑数预注册,预注册文件带 hash 落仓。</a:t>
+              <a:t>讲者注:同样的记忆同样的题,变的只是读取端路由;+32.8 = 方法 27.4 + 测量修正 5.4,拆开报。</a:t>
             </a:r>
             <a:endParaRPr lang="en-US" dirty="0"/>
           </a:p>
@@ -2028,8 +2017,7 @@
           <a:p>
             <a:r>
               <a:rPr lang="en-US" dirty="0"/>
-              <a:t>讲者注:tr 62.4 是已知短板,主动讲 —— 不藏短板是可信度的一部分。
-ssu 97.1 说明单会话用户事实几乎全对;tr 是时序推理,检索型方案的天然硬骨头。</a:t>
+              <a:t>讲者注:tr 62.4 是已知短板,主动讲;ms/ssa/tr 是摘要层带起来的三弱型。</a:t>
             </a:r>
             <a:endParaRPr lang="en-US" dirty="0"/>
           </a:p>
@@ -2117,9 +2105,7 @@
           <a:p>
             <a:r>
               <a:rPr lang="en-US" dirty="0"/>
-              <a:t>讲者注:如果有人只记一页,记这页。强调"同题同判据"四个字。
-跨 harness 分数不可比 —— mem0 自报 94.4% 是他们的 harness/判官/口径,不比。
-备询:嵌入各用各的默认(我方 BGE-m3 / mem0 text-embedding-005),对方嵌入在部分单会话型更强,我们靠分型路由整体赢。</a:t>
+              <a:t>讲者注:各用默认嵌入(我方 BGE-m3,mem0 侧 text-embedding-005)= 开箱对打;对方嵌入部分单会话型更强,我们靠路由整体赢。复现 ≈$3.50。</a:t>
             </a:r>
             <a:endParaRPr lang="en-US" dirty="0"/>
           </a:p>
